--- a/output_polarity_map_simple.pptx
+++ b/output_polarity_map_simple.pptx
@@ -13992,11 +13992,7 @@
           <a:bodyPr/>
           <a:lstStyle/>
           <a:p>
-            <a:pPr lvl="0"/>
-            <a:r>
-              <a:rPr lang="de-DE" dirty="0" sz="1200"/>
-              <a:t>Integrationserfolg durch vertrauensvolle und kritikfähige Vorstandskultur.</a:t>
-            </a:r>
+            <a:endParaRPr lang="de-DE"/>
           </a:p>
         </p:txBody>
       </p:sp>
@@ -14021,11 +14017,7 @@
           <a:bodyPr/>
           <a:lstStyle/>
           <a:p>
-            <a:pPr lvl="0"/>
-            <a:r>
-              <a:rPr lang="de-DE" dirty="0" sz="1200"/>
-              <a:t>Die Organisation wird durch ungelöste Kulturkonflikte handlungsunfähig.</a:t>
-            </a:r>
+            <a:endParaRPr lang="de-DE"/>
           </a:p>
         </p:txBody>
       </p:sp>
@@ -14050,11 +14042,7 @@
           <a:bodyPr/>
           <a:lstStyle/>
           <a:p>
-            <a:pPr lvl="0"/>
-            <a:r>
-              <a:rPr lang="de-DE" dirty="0" sz="1200"/>
-              <a:t>Tragfähige Beziehungen</a:t>
-            </a:r>
+            <a:endParaRPr lang="de-DE"/>
           </a:p>
         </p:txBody>
       </p:sp>
@@ -14079,11 +14067,7 @@
           <a:bodyPr/>
           <a:lstStyle/>
           <a:p>
-            <a:pPr lvl="0"/>
-            <a:r>
-              <a:rPr lang="de-DE" dirty="0" sz="1200"/>
-              <a:t>Klarheit und Kritikfähigkeit</a:t>
-            </a:r>
+            <a:endParaRPr lang="de-DE"/>
           </a:p>
         </p:txBody>
       </p:sp>
@@ -14113,7 +14097,7 @@
             </a:pPr>
             <a:r>
               <a:rPr lang="de-DE" dirty="0" sz="1100"/>
-              <a:t>psychologische Sicherheit ermöglicht offene Gespräche</a:t>
+              <a:t/>
             </a:r>
           </a:p>
           <a:p>
@@ -14122,7 +14106,7 @@
             </a:pPr>
             <a:r>
               <a:rPr lang="de-DE" dirty="0" sz="1100"/>
-              <a:t>Vertrauen beschleunigt Entscheidungsprozesse</a:t>
+              <a:t/>
             </a:r>
           </a:p>
           <a:p>
@@ -14131,7 +14115,7 @@
             </a:pPr>
             <a:r>
               <a:rPr lang="de-DE" dirty="0" sz="1100"/>
-              <a:t>Teamatmosphäre fördert konstruktive Lösungen</a:t>
+              <a:t/>
             </a:r>
           </a:p>
         </p:txBody>
@@ -14162,7 +14146,7 @@
             </a:pPr>
             <a:r>
               <a:rPr lang="de-DE" dirty="0" sz="1100"/>
-              <a:t>kritische Themen werden nicht angesprochen</a:t>
+              <a:t/>
             </a:r>
           </a:p>
           <a:p>
@@ -14171,7 +14155,7 @@
             </a:pPr>
             <a:r>
               <a:rPr lang="de-DE" dirty="0" sz="1100"/>
-              <a:t>fehlende Weiterentwicklung führt zu Stillstand</a:t>
+              <a:t/>
             </a:r>
           </a:p>
           <a:p>
@@ -14180,7 +14164,7 @@
             </a:pPr>
             <a:r>
               <a:rPr lang="de-DE" dirty="0" sz="1100"/>
-              <a:t>Gruppenkonsens verhindert notwendige Veränderungen</a:t>
+              <a:t/>
             </a:r>
           </a:p>
         </p:txBody>
@@ -14211,7 +14195,7 @@
             </a:pPr>
             <a:r>
               <a:rPr lang="de-DE" dirty="0" sz="1100"/>
-              <a:t>blinde Flecken werden systematisch aufgedeckt</a:t>
+              <a:t/>
             </a:r>
           </a:p>
           <a:p>
@@ -14220,7 +14204,7 @@
             </a:pPr>
             <a:r>
               <a:rPr lang="de-DE" dirty="0" sz="1100"/>
-              <a:t>kontinuierliches Lernen verbessert Prozesse</a:t>
+              <a:t/>
             </a:r>
           </a:p>
           <a:p>
@@ -14229,7 +14213,7 @@
             </a:pPr>
             <a:r>
               <a:rPr lang="de-DE" dirty="0" sz="1100"/>
-              <a:t>Weiterentwicklung sichert Zukunftsfähigkeit</a:t>
+              <a:t/>
             </a:r>
           </a:p>
         </p:txBody>
@@ -14260,7 +14244,7 @@
             </a:pPr>
             <a:r>
               <a:rPr lang="de-DE" dirty="0" sz="1100"/>
-              <a:t>psychologische Sicherheit geht verloren</a:t>
+              <a:t/>
             </a:r>
           </a:p>
           <a:p>
@@ -14269,7 +14253,7 @@
             </a:pPr>
             <a:r>
               <a:rPr lang="de-DE" dirty="0" sz="1100"/>
-              <a:t>Misstrauen blockiert offene Kommunikation</a:t>
+              <a:t/>
             </a:r>
           </a:p>
           <a:p>
@@ -14278,7 +14262,7 @@
             </a:pPr>
             <a:r>
               <a:rPr lang="de-DE" dirty="0" sz="1100"/>
-              <a:t>Teamatmosphäre leidet unter ständiger Kritik</a:t>
+              <a:t/>
             </a:r>
           </a:p>
         </p:txBody>

--- a/output_polarity_map_simple.pptx
+++ b/output_polarity_map_simple.pptx
@@ -13992,7 +13992,11 @@
           <a:bodyPr/>
           <a:lstStyle/>
           <a:p>
-            <a:endParaRPr lang="de-DE"/>
+            <a:pPr lvl="0"/>
+            <a:r>
+              <a:rPr lang="de-DE" dirty="0" sz="1200"/>
+              <a:t>Ganzheitliche Intelligenz für nachhaltigen Lebens- und Arbeitserfolg.</a:t>
+            </a:r>
           </a:p>
         </p:txBody>
       </p:sp>
@@ -14017,7 +14021,11 @@
           <a:bodyPr/>
           <a:lstStyle/>
           <a:p>
-            <a:endParaRPr lang="de-DE"/>
+            <a:pPr lvl="0"/>
+            <a:r>
+              <a:rPr lang="de-DE" dirty="0" sz="1200"/>
+              <a:t>Die Organisation scheitert an einseitiger Intelligenznutzung.</a:t>
+            </a:r>
           </a:p>
         </p:txBody>
       </p:sp>
@@ -14042,7 +14050,11 @@
           <a:bodyPr/>
           <a:lstStyle/>
           <a:p>
-            <a:endParaRPr lang="de-DE"/>
+            <a:pPr lvl="0"/>
+            <a:r>
+              <a:rPr lang="de-DE" dirty="0" sz="1200"/>
+              <a:t>Emotionale und soziale Intelligenz</a:t>
+            </a:r>
           </a:p>
         </p:txBody>
       </p:sp>
@@ -14067,7 +14079,11 @@
           <a:bodyPr/>
           <a:lstStyle/>
           <a:p>
-            <a:endParaRPr lang="de-DE"/>
+            <a:pPr lvl="0"/>
+            <a:r>
+              <a:rPr lang="de-DE" dirty="0" sz="1200"/>
+              <a:t>Kognitive Intelligenz</a:t>
+            </a:r>
           </a:p>
         </p:txBody>
       </p:sp>
@@ -14097,7 +14113,7 @@
             </a:pPr>
             <a:r>
               <a:rPr lang="de-DE" dirty="0" sz="1100"/>
-              <a:t/>
+              <a:t>Teams arbeiten vertrauensvoll und konfliktfähig zusammen</a:t>
             </a:r>
           </a:p>
           <a:p>
@@ -14106,7 +14122,7 @@
             </a:pPr>
             <a:r>
               <a:rPr lang="de-DE" dirty="0" sz="1100"/>
-              <a:t/>
+              <a:t>Führungskräfte regulieren Emotionen in Stresssituationen souverän</a:t>
             </a:r>
           </a:p>
           <a:p>
@@ -14115,7 +14131,7 @@
             </a:pPr>
             <a:r>
               <a:rPr lang="de-DE" dirty="0" sz="1100"/>
-              <a:t/>
+              <a:t>Mitarbeitende bauen tragfähige berufliche Netzwerke auf</a:t>
             </a:r>
           </a:p>
         </p:txBody>
@@ -14146,7 +14162,7 @@
             </a:pPr>
             <a:r>
               <a:rPr lang="de-DE" dirty="0" sz="1100"/>
-              <a:t/>
+              <a:t>Analytische Tiefe fehlt bei komplexen Sachfragen</a:t>
             </a:r>
           </a:p>
           <a:p>
@@ -14155,7 +14171,7 @@
             </a:pPr>
             <a:r>
               <a:rPr lang="de-DE" dirty="0" sz="1100"/>
-              <a:t/>
+              <a:t>Emotionale Dynamiken überlagern rationale Entscheidungsfindung</a:t>
             </a:r>
           </a:p>
           <a:p>
@@ -14164,7 +14180,7 @@
             </a:pPr>
             <a:r>
               <a:rPr lang="de-DE" dirty="0" sz="1100"/>
-              <a:t/>
+              <a:t>Technische Innovationen bleiben hinter Möglichkeiten zurück</a:t>
             </a:r>
           </a:p>
         </p:txBody>
@@ -14195,7 +14211,7 @@
             </a:pPr>
             <a:r>
               <a:rPr lang="de-DE" dirty="0" sz="1100"/>
-              <a:t/>
+              <a:t>Komplexe Probleme werden analytisch durchdrungen</a:t>
             </a:r>
           </a:p>
           <a:p>
@@ -14204,7 +14220,7 @@
             </a:pPr>
             <a:r>
               <a:rPr lang="de-DE" dirty="0" sz="1100"/>
-              <a:t/>
+              <a:t>Entscheidungen basieren auf validierten Datenanalysen</a:t>
             </a:r>
           </a:p>
           <a:p>
@@ -14213,7 +14229,7 @@
             </a:pPr>
             <a:r>
               <a:rPr lang="de-DE" dirty="0" sz="1100"/>
-              <a:t/>
+              <a:t>Fachliche Exzellenz prägt die Arbeitsqualität</a:t>
             </a:r>
           </a:p>
         </p:txBody>
@@ -14244,7 +14260,7 @@
             </a:pPr>
             <a:r>
               <a:rPr lang="de-DE" dirty="0" sz="1100"/>
-              <a:t/>
+              <a:t>Teamkonflikte eskalieren durch fehlende Empathie</a:t>
             </a:r>
           </a:p>
           <a:p>
@@ -14253,7 +14269,7 @@
             </a:pPr>
             <a:r>
               <a:rPr lang="de-DE" dirty="0" sz="1100"/>
-              <a:t/>
+              <a:t>Führungskräfte scheitern an zwischenmenschlichen Herausforderungen</a:t>
             </a:r>
           </a:p>
           <a:p>
@@ -14262,7 +14278,7 @@
             </a:pPr>
             <a:r>
               <a:rPr lang="de-DE" dirty="0" sz="1100"/>
-              <a:t/>
+              <a:t>Mitarbeiterbindung leidet unter rein leistungsorientierter Kultur</a:t>
             </a:r>
           </a:p>
         </p:txBody>

--- a/output_polarity_map_simple.pptx
+++ b/output_polarity_map_simple.pptx
@@ -13995,7 +13995,7 @@
             <a:pPr lvl="0"/>
             <a:r>
               <a:rPr lang="de-DE" dirty="0" sz="1200"/>
-              <a:t>Ganzheitliche Intelligenz für nachhaltigen Lebens- und Arbeitserfolg.</a:t>
+              <a:t>Ganzheitliche Leistungsfähigkeit durch balancierte Intelligenzen</a:t>
             </a:r>
           </a:p>
         </p:txBody>
@@ -14024,7 +14024,7 @@
             <a:pPr lvl="0"/>
             <a:r>
               <a:rPr lang="de-DE" dirty="0" sz="1200"/>
-              <a:t>Die Organisation scheitert an einseitiger Intelligenznutzung.</a:t>
+              <a:t>Einseitige Talententwicklung führt zu organisationaler Stagnation</a:t>
             </a:r>
           </a:p>
         </p:txBody>
@@ -14053,7 +14053,7 @@
             <a:pPr lvl="0"/>
             <a:r>
               <a:rPr lang="de-DE" dirty="0" sz="1200"/>
-              <a:t>Emotionale und soziale Intelligenz</a:t>
+              <a:t>Kognitive Intelligenz &amp; Fachwissen</a:t>
             </a:r>
           </a:p>
         </p:txBody>
@@ -14082,7 +14082,7 @@
             <a:pPr lvl="0"/>
             <a:r>
               <a:rPr lang="de-DE" dirty="0" sz="1200"/>
-              <a:t>Kognitive Intelligenz</a:t>
+              <a:t>Emotionale Intelligenz &amp; soziale Kompetenz</a:t>
             </a:r>
           </a:p>
         </p:txBody>
@@ -14113,7 +14113,7 @@
             </a:pPr>
             <a:r>
               <a:rPr lang="de-DE" dirty="0" sz="1100"/>
-              <a:t>Teams arbeiten vertrauensvoll und konfliktfähig zusammen</a:t>
+              <a:t>komplexe Problemlösungen werden systematisch erarbeitet</a:t>
             </a:r>
           </a:p>
           <a:p>
@@ -14122,7 +14122,7 @@
             </a:pPr>
             <a:r>
               <a:rPr lang="de-DE" dirty="0" sz="1100"/>
-              <a:t>Führungskräfte regulieren Emotionen in Stresssituationen souverän</a:t>
+              <a:t>fachliche Expertise sichert fundierte Entscheidungen</a:t>
             </a:r>
           </a:p>
           <a:p>
@@ -14131,7 +14131,7 @@
             </a:pPr>
             <a:r>
               <a:rPr lang="de-DE" dirty="0" sz="1100"/>
-              <a:t>Mitarbeitende bauen tragfähige berufliche Netzwerke auf</a:t>
+              <a:t>objektive Leistungsmessungen schaffen klare Standards</a:t>
             </a:r>
           </a:p>
         </p:txBody>
@@ -14162,7 +14162,7 @@
             </a:pPr>
             <a:r>
               <a:rPr lang="de-DE" dirty="0" sz="1100"/>
-              <a:t>Analytische Tiefe fehlt bei komplexen Sachfragen</a:t>
+              <a:t>Arbeitsleistung bleibt unter Potenzial</a:t>
             </a:r>
           </a:p>
           <a:p>
@@ -14171,7 +14171,7 @@
             </a:pPr>
             <a:r>
               <a:rPr lang="de-DE" dirty="0" sz="1100"/>
-              <a:t>Emotionale Dynamiken überlagern rationale Entscheidungsfindung</a:t>
+              <a:t>zwischenmenschliche Spannungen eskalieren ungelöst</a:t>
             </a:r>
           </a:p>
           <a:p>
@@ -14180,7 +14180,7 @@
             </a:pPr>
             <a:r>
               <a:rPr lang="de-DE" dirty="0" sz="1100"/>
-              <a:t>Technische Innovationen bleiben hinter Möglichkeiten zurück</a:t>
+              <a:t>Führungsqualität leidet unter fehlender Empathie</a:t>
             </a:r>
           </a:p>
         </p:txBody>
@@ -14211,7 +14211,7 @@
             </a:pPr>
             <a:r>
               <a:rPr lang="de-DE" dirty="0" sz="1100"/>
-              <a:t>Komplexe Probleme werden analytisch durchdrungen</a:t>
+              <a:t>Teams kooperieren vertrauensvoll und produktiv</a:t>
             </a:r>
           </a:p>
           <a:p>
@@ -14220,7 +14220,7 @@
             </a:pPr>
             <a:r>
               <a:rPr lang="de-DE" dirty="0" sz="1100"/>
-              <a:t>Entscheidungen basieren auf validierten Datenanalysen</a:t>
+              <a:t>Führungskräfte regulieren Konflikte konstruktiv</a:t>
             </a:r>
           </a:p>
           <a:p>
@@ -14229,7 +14229,7 @@
             </a:pPr>
             <a:r>
               <a:rPr lang="de-DE" dirty="0" sz="1100"/>
-              <a:t>Fachliche Exzellenz prägt die Arbeitsqualität</a:t>
+              <a:t>Mitarbeitende bewältigen Stress adaptiv</a:t>
             </a:r>
           </a:p>
         </p:txBody>
@@ -14260,7 +14260,7 @@
             </a:pPr>
             <a:r>
               <a:rPr lang="de-DE" dirty="0" sz="1100"/>
-              <a:t>Teamkonflikte eskalieren durch fehlende Empathie</a:t>
+              <a:t>fachliche Glaubwürdigkeit geht verloren</a:t>
             </a:r>
           </a:p>
           <a:p>
@@ -14269,7 +14269,7 @@
             </a:pPr>
             <a:r>
               <a:rPr lang="de-DE" dirty="0" sz="1100"/>
-              <a:t>Führungskräfte scheitern an zwischenmenschlichen Herausforderungen</a:t>
+              <a:t>Entscheidungen basieren auf Oberflächlichkeit</a:t>
             </a:r>
           </a:p>
           <a:p>
@@ -14278,7 +14278,7 @@
             </a:pPr>
             <a:r>
               <a:rPr lang="de-DE" dirty="0" sz="1100"/>
-              <a:t>Mitarbeiterbindung leidet unter rein leistungsorientierter Kultur</a:t>
+              <a:t>objektive Leistungsbewertung wird unmöglich</a:t>
             </a:r>
           </a:p>
         </p:txBody>
